--- a/neerlandais1/powerpoints/Module_27_Graag_of_houden_van.pptx
+++ b/neerlandais1/powerpoints/Module_27_Graag_of_houden_van.pptx
@@ -133,18 +133,18 @@
   <p:extLst>
     <p:ext uri="{521415D9-36F7-43E2-AB2F-B90AF26B5E84}">
       <p14:sectionLst xmlns:p14="http://schemas.microsoft.com/office/powerpoint/2010/main">
-        <p14:section name="Ouverture" id="{f0ebf811-f96f-f6f1-f73e-622145ee6a10}">
+        <p14:section name="Ouverture" id="{f6605700-d3b4-58d1-ddc9-9d9d37a7e604}">
           <p14:sldIdLst>
             <p14:sldId id="256"/>
           </p14:sldIdLst>
         </p14:section>
-        <p14:section name="Découvrir" id="{41988e9b-d3e5-1aca-7dcd-a4e0bf2677c7}">
+        <p14:section name="Découvrir" id="{70a41e90-1d3c-de17-d956-f140594de19f}">
           <p14:sldIdLst>
             <p14:sldId id="257"/>
             <p14:sldId id="258"/>
           </p14:sldIdLst>
         </p14:section>
-        <p14:section name="Comprendre" id="{980fa46c-a7e2-3b77-a718-4c2c95b97325}">
+        <p14:section name="Comprendre" id="{97600bc0-2a66-16e7-9b11-fd814ff81dd3}">
           <p14:sldIdLst>
             <p14:sldId id="259"/>
             <p14:sldId id="260"/>
@@ -158,7 +158,7 @@
             <p14:sldId id="268"/>
           </p14:sldIdLst>
         </p14:section>
-        <p14:section name="JIJ NU ! — Oefeningen" id="{64c35992-91d5-5261-3ecf-612df6d96c58}">
+        <p14:section name="JIJ NU ! — Oefeningen" id="{d027a2ae-da7d-4d46-7103-23d1d690a0d0}">
           <p14:sldIdLst>
             <p14:sldId id="269"/>
             <p14:sldId id="270"/>
@@ -175,7 +175,7 @@
             <p14:sldId id="281"/>
           </p14:sldIdLst>
         </p14:section>
-        <p14:section name="Clôture" id="{818a4a42-6aa8-5400-0465-1c566de18317}">
+        <p14:section name="Clôture" id="{3cd40d1d-2f70-f769-91d4-c24de7379e06}">
           <p14:sldIdLst>
             <p14:sldId id="282"/>
           </p14:sldIdLst>
@@ -3806,7 +3806,7 @@
                   <a:srgbClr val="FFFFFF"/>
                 </a:solidFill>
               </a:rPr>
-              <a:t>MODULE 27 / 29</a:t>
+              <a:t>MODULE 27 / 32</a:t>
             </a:r>
             <a:endParaRPr lang="en-US" sz="1400" dirty="0"/>
           </a:p>

--- a/neerlandais1/powerpoints/Module_27_Graag_of_houden_van.pptx
+++ b/neerlandais1/powerpoints/Module_27_Graag_of_houden_van.pptx
@@ -133,18 +133,18 @@
   <p:extLst>
     <p:ext uri="{521415D9-36F7-43E2-AB2F-B90AF26B5E84}">
       <p14:sectionLst xmlns:p14="http://schemas.microsoft.com/office/powerpoint/2010/main">
-        <p14:section name="Ouverture" id="{f6605700-d3b4-58d1-ddc9-9d9d37a7e604}">
+        <p14:section name="Ouverture" id="{aae6ccd6-9384-bdc3-1d88-5a44e3c26f03}">
           <p14:sldIdLst>
             <p14:sldId id="256"/>
           </p14:sldIdLst>
         </p14:section>
-        <p14:section name="Découvrir" id="{70a41e90-1d3c-de17-d956-f140594de19f}">
+        <p14:section name="Découvrir" id="{9df6dadc-15aa-6dd9-2e34-c0deaae8e280}">
           <p14:sldIdLst>
             <p14:sldId id="257"/>
             <p14:sldId id="258"/>
           </p14:sldIdLst>
         </p14:section>
-        <p14:section name="Comprendre" id="{97600bc0-2a66-16e7-9b11-fd814ff81dd3}">
+        <p14:section name="Comprendre" id="{39de518c-cfb4-53a6-0020-56be8f872e7f}">
           <p14:sldIdLst>
             <p14:sldId id="259"/>
             <p14:sldId id="260"/>
@@ -158,7 +158,7 @@
             <p14:sldId id="268"/>
           </p14:sldIdLst>
         </p14:section>
-        <p14:section name="JIJ NU ! — Oefeningen" id="{d027a2ae-da7d-4d46-7103-23d1d690a0d0}">
+        <p14:section name="JIJ NU ! — Oefeningen" id="{63e73336-67f8-b7fe-daa3-3a171f88d28e}">
           <p14:sldIdLst>
             <p14:sldId id="269"/>
             <p14:sldId id="270"/>
@@ -175,7 +175,7 @@
             <p14:sldId id="281"/>
           </p14:sldIdLst>
         </p14:section>
-        <p14:section name="Clôture" id="{3cd40d1d-2f70-f769-91d4-c24de7379e06}">
+        <p14:section name="Clôture" id="{25a311d8-bcd9-937a-1672-07ec0c2f8cd3}">
           <p14:sldIdLst>
             <p14:sldId id="282"/>
           </p14:sldIdLst>

--- a/neerlandais1/powerpoints/Module_27_Graag_of_houden_van.pptx
+++ b/neerlandais1/powerpoints/Module_27_Graag_of_houden_van.pptx
@@ -133,18 +133,18 @@
   <p:extLst>
     <p:ext uri="{521415D9-36F7-43E2-AB2F-B90AF26B5E84}">
       <p14:sectionLst xmlns:p14="http://schemas.microsoft.com/office/powerpoint/2010/main">
-        <p14:section name="Ouverture" id="{aae6ccd6-9384-bdc3-1d88-5a44e3c26f03}">
+        <p14:section name="Ouverture" id="{a36fcb82-0365-cf2c-c00f-a3f0250ae866}">
           <p14:sldIdLst>
             <p14:sldId id="256"/>
           </p14:sldIdLst>
         </p14:section>
-        <p14:section name="Découvrir" id="{9df6dadc-15aa-6dd9-2e34-c0deaae8e280}">
+        <p14:section name="Découvrir" id="{7f22d19d-7487-5873-5c32-23b58a8a21bb}">
           <p14:sldIdLst>
             <p14:sldId id="257"/>
             <p14:sldId id="258"/>
           </p14:sldIdLst>
         </p14:section>
-        <p14:section name="Comprendre" id="{39de518c-cfb4-53a6-0020-56be8f872e7f}">
+        <p14:section name="Comprendre" id="{e685d405-38b4-3826-4050-9e1f60d7137e}">
           <p14:sldIdLst>
             <p14:sldId id="259"/>
             <p14:sldId id="260"/>
@@ -158,7 +158,7 @@
             <p14:sldId id="268"/>
           </p14:sldIdLst>
         </p14:section>
-        <p14:section name="JIJ NU ! — Oefeningen" id="{63e73336-67f8-b7fe-daa3-3a171f88d28e}">
+        <p14:section name="JIJ NU ! — Oefeningen" id="{3a3f4527-b377-8f9a-6f93-9afb507cb670}">
           <p14:sldIdLst>
             <p14:sldId id="269"/>
             <p14:sldId id="270"/>
@@ -175,7 +175,7 @@
             <p14:sldId id="281"/>
           </p14:sldIdLst>
         </p14:section>
-        <p14:section name="Clôture" id="{25a311d8-bcd9-937a-1672-07ec0c2f8cd3}">
+        <p14:section name="Clôture" id="{51dd2582-25d9-b054-bc54-d0adbb411ad9}">
           <p14:sldIdLst>
             <p14:sldId id="282"/>
           </p14:sldIdLst>

--- a/neerlandais1/powerpoints/Module_27_Graag_of_houden_van.pptx
+++ b/neerlandais1/powerpoints/Module_27_Graag_of_houden_van.pptx
@@ -133,18 +133,18 @@
   <p:extLst>
     <p:ext uri="{521415D9-36F7-43E2-AB2F-B90AF26B5E84}">
       <p14:sectionLst xmlns:p14="http://schemas.microsoft.com/office/powerpoint/2010/main">
-        <p14:section name="Ouverture" id="{a36fcb82-0365-cf2c-c00f-a3f0250ae866}">
+        <p14:section name="Ouverture" id="{f4565348-e5f3-fedd-40d5-762731596a4f}">
           <p14:sldIdLst>
             <p14:sldId id="256"/>
           </p14:sldIdLst>
         </p14:section>
-        <p14:section name="Découvrir" id="{7f22d19d-7487-5873-5c32-23b58a8a21bb}">
+        <p14:section name="Découvrir" id="{91f48241-2db7-568a-cd08-0d4be835d8e7}">
           <p14:sldIdLst>
             <p14:sldId id="257"/>
             <p14:sldId id="258"/>
           </p14:sldIdLst>
         </p14:section>
-        <p14:section name="Comprendre" id="{e685d405-38b4-3826-4050-9e1f60d7137e}">
+        <p14:section name="Comprendre" id="{d52684b6-8d2b-6805-14f5-90a7ed517d1a}">
           <p14:sldIdLst>
             <p14:sldId id="259"/>
             <p14:sldId id="260"/>
@@ -158,7 +158,7 @@
             <p14:sldId id="268"/>
           </p14:sldIdLst>
         </p14:section>
-        <p14:section name="JIJ NU ! — Oefeningen" id="{3a3f4527-b377-8f9a-6f93-9afb507cb670}">
+        <p14:section name="JIJ NU ! — Oefeningen" id="{7f9bcecf-cc57-0533-1d15-52c22d79900f}">
           <p14:sldIdLst>
             <p14:sldId id="269"/>
             <p14:sldId id="270"/>
@@ -175,7 +175,7 @@
             <p14:sldId id="281"/>
           </p14:sldIdLst>
         </p14:section>
-        <p14:section name="Clôture" id="{51dd2582-25d9-b054-bc54-d0adbb411ad9}">
+        <p14:section name="Clôture" id="{ad3f9bf4-5c8e-fa30-5ba4-f66c56971844}">
           <p14:sldIdLst>
             <p14:sldId id="282"/>
           </p14:sldIdLst>

--- a/neerlandais1/powerpoints/Module_27_Graag_of_houden_van.pptx
+++ b/neerlandais1/powerpoints/Module_27_Graag_of_houden_van.pptx
@@ -133,18 +133,18 @@
   <p:extLst>
     <p:ext uri="{521415D9-36F7-43E2-AB2F-B90AF26B5E84}">
       <p14:sectionLst xmlns:p14="http://schemas.microsoft.com/office/powerpoint/2010/main">
-        <p14:section name="Ouverture" id="{f4565348-e5f3-fedd-40d5-762731596a4f}">
+        <p14:section name="Ouverture" id="{78e3bb2d-ba62-a5ff-27e0-0c581660f352}">
           <p14:sldIdLst>
             <p14:sldId id="256"/>
           </p14:sldIdLst>
         </p14:section>
-        <p14:section name="Découvrir" id="{91f48241-2db7-568a-cd08-0d4be835d8e7}">
+        <p14:section name="Découvrir" id="{3a360e12-d234-b246-95f2-5668c85b652e}">
           <p14:sldIdLst>
             <p14:sldId id="257"/>
             <p14:sldId id="258"/>
           </p14:sldIdLst>
         </p14:section>
-        <p14:section name="Comprendre" id="{d52684b6-8d2b-6805-14f5-90a7ed517d1a}">
+        <p14:section name="Comprendre" id="{e2a3f86d-88d2-ff01-c5eb-536d4facc54b}">
           <p14:sldIdLst>
             <p14:sldId id="259"/>
             <p14:sldId id="260"/>
@@ -158,7 +158,7 @@
             <p14:sldId id="268"/>
           </p14:sldIdLst>
         </p14:section>
-        <p14:section name="JIJ NU ! — Oefeningen" id="{7f9bcecf-cc57-0533-1d15-52c22d79900f}">
+        <p14:section name="JIJ NU ! — Oefeningen" id="{dcd3fe54-b785-51d4-da5a-f9e0a5d8b45c}">
           <p14:sldIdLst>
             <p14:sldId id="269"/>
             <p14:sldId id="270"/>
@@ -175,7 +175,7 @@
             <p14:sldId id="281"/>
           </p14:sldIdLst>
         </p14:section>
-        <p14:section name="Clôture" id="{ad3f9bf4-5c8e-fa30-5ba4-f66c56971844}">
+        <p14:section name="Clôture" id="{465f9c9f-427a-12c9-0318-f492230c2907}">
           <p14:sldIdLst>
             <p14:sldId id="282"/>
           </p14:sldIdLst>

--- a/neerlandais1/powerpoints/Module_27_Graag_of_houden_van.pptx
+++ b/neerlandais1/powerpoints/Module_27_Graag_of_houden_van.pptx
@@ -133,18 +133,18 @@
   <p:extLst>
     <p:ext uri="{521415D9-36F7-43E2-AB2F-B90AF26B5E84}">
       <p14:sectionLst xmlns:p14="http://schemas.microsoft.com/office/powerpoint/2010/main">
-        <p14:section name="Ouverture" id="{78e3bb2d-ba62-a5ff-27e0-0c581660f352}">
+        <p14:section name="Ouverture" id="{d207f76b-dc34-c8a9-cb48-2bae73192eac}">
           <p14:sldIdLst>
             <p14:sldId id="256"/>
           </p14:sldIdLst>
         </p14:section>
-        <p14:section name="Découvrir" id="{3a360e12-d234-b246-95f2-5668c85b652e}">
+        <p14:section name="Découvrir" id="{a1a47c80-edc4-d606-604a-43cb9fc53e5c}">
           <p14:sldIdLst>
             <p14:sldId id="257"/>
             <p14:sldId id="258"/>
           </p14:sldIdLst>
         </p14:section>
-        <p14:section name="Comprendre" id="{e2a3f86d-88d2-ff01-c5eb-536d4facc54b}">
+        <p14:section name="Comprendre" id="{c3714c2f-d854-aa69-124b-1a88b14e4bdb}">
           <p14:sldIdLst>
             <p14:sldId id="259"/>
             <p14:sldId id="260"/>
@@ -158,7 +158,7 @@
             <p14:sldId id="268"/>
           </p14:sldIdLst>
         </p14:section>
-        <p14:section name="JIJ NU ! — Oefeningen" id="{dcd3fe54-b785-51d4-da5a-f9e0a5d8b45c}">
+        <p14:section name="JIJ NU ! — Oefeningen" id="{a171cb90-591e-ebae-cbd8-98bb87cb5c8d}">
           <p14:sldIdLst>
             <p14:sldId id="269"/>
             <p14:sldId id="270"/>
@@ -175,7 +175,7 @@
             <p14:sldId id="281"/>
           </p14:sldIdLst>
         </p14:section>
-        <p14:section name="Clôture" id="{465f9c9f-427a-12c9-0318-f492230c2907}">
+        <p14:section name="Clôture" id="{f37e74ae-8ef0-f471-423b-04c6f1a83724}">
           <p14:sldIdLst>
             <p14:sldId id="282"/>
           </p14:sldIdLst>

--- a/neerlandais1/powerpoints/Module_27_Graag_of_houden_van.pptx
+++ b/neerlandais1/powerpoints/Module_27_Graag_of_houden_van.pptx
@@ -133,18 +133,18 @@
   <p:extLst>
     <p:ext uri="{521415D9-36F7-43E2-AB2F-B90AF26B5E84}">
       <p14:sectionLst xmlns:p14="http://schemas.microsoft.com/office/powerpoint/2010/main">
-        <p14:section name="Ouverture" id="{d207f76b-dc34-c8a9-cb48-2bae73192eac}">
+        <p14:section name="Ouverture" id="{ca6d13a8-77c4-fbc8-e47a-f697d963fb05}">
           <p14:sldIdLst>
             <p14:sldId id="256"/>
           </p14:sldIdLst>
         </p14:section>
-        <p14:section name="Découvrir" id="{a1a47c80-edc4-d606-604a-43cb9fc53e5c}">
+        <p14:section name="Découvrir" id="{1c2407c8-1966-56cb-fb8e-e41e38236dfe}">
           <p14:sldIdLst>
             <p14:sldId id="257"/>
             <p14:sldId id="258"/>
           </p14:sldIdLst>
         </p14:section>
-        <p14:section name="Comprendre" id="{c3714c2f-d854-aa69-124b-1a88b14e4bdb}">
+        <p14:section name="Comprendre" id="{3f406caf-80f2-ce5c-c138-a750d5eb5b25}">
           <p14:sldIdLst>
             <p14:sldId id="259"/>
             <p14:sldId id="260"/>
@@ -158,7 +158,7 @@
             <p14:sldId id="268"/>
           </p14:sldIdLst>
         </p14:section>
-        <p14:section name="JIJ NU ! — Oefeningen" id="{a171cb90-591e-ebae-cbd8-98bb87cb5c8d}">
+        <p14:section name="JIJ NU ! — Oefeningen" id="{67390345-2c63-b39d-1b8d-0102e1c57356}">
           <p14:sldIdLst>
             <p14:sldId id="269"/>
             <p14:sldId id="270"/>
@@ -175,7 +175,7 @@
             <p14:sldId id="281"/>
           </p14:sldIdLst>
         </p14:section>
-        <p14:section name="Clôture" id="{f37e74ae-8ef0-f471-423b-04c6f1a83724}">
+        <p14:section name="Clôture" id="{b32d5198-1d80-4d47-960f-2cd79d255a99}">
           <p14:sldIdLst>
             <p14:sldId id="282"/>
           </p14:sldIdLst>

--- a/neerlandais1/powerpoints/Module_27_Graag_of_houden_van.pptx
+++ b/neerlandais1/powerpoints/Module_27_Graag_of_houden_van.pptx
@@ -133,18 +133,18 @@
   <p:extLst>
     <p:ext uri="{521415D9-36F7-43E2-AB2F-B90AF26B5E84}">
       <p14:sectionLst xmlns:p14="http://schemas.microsoft.com/office/powerpoint/2010/main">
-        <p14:section name="Ouverture" id="{ca6d13a8-77c4-fbc8-e47a-f697d963fb05}">
+        <p14:section name="Ouverture" id="{663380fb-6f27-69cf-e348-e6c293b9c539}">
           <p14:sldIdLst>
             <p14:sldId id="256"/>
           </p14:sldIdLst>
         </p14:section>
-        <p14:section name="Découvrir" id="{1c2407c8-1966-56cb-fb8e-e41e38236dfe}">
+        <p14:section name="Découvrir" id="{0cea2d41-dfa8-b0c1-c25f-3f487120a47a}">
           <p14:sldIdLst>
             <p14:sldId id="257"/>
             <p14:sldId id="258"/>
           </p14:sldIdLst>
         </p14:section>
-        <p14:section name="Comprendre" id="{3f406caf-80f2-ce5c-c138-a750d5eb5b25}">
+        <p14:section name="Comprendre" id="{53cb32d3-c879-9b2f-cd10-fcd620ed3b47}">
           <p14:sldIdLst>
             <p14:sldId id="259"/>
             <p14:sldId id="260"/>
@@ -158,7 +158,7 @@
             <p14:sldId id="268"/>
           </p14:sldIdLst>
         </p14:section>
-        <p14:section name="JIJ NU ! — Oefeningen" id="{67390345-2c63-b39d-1b8d-0102e1c57356}">
+        <p14:section name="JIJ NU ! — Oefeningen" id="{1b34be93-0094-175a-ea25-9681bf203255}">
           <p14:sldIdLst>
             <p14:sldId id="269"/>
             <p14:sldId id="270"/>
@@ -175,7 +175,7 @@
             <p14:sldId id="281"/>
           </p14:sldIdLst>
         </p14:section>
-        <p14:section name="Clôture" id="{b32d5198-1d80-4d47-960f-2cd79d255a99}">
+        <p14:section name="Clôture" id="{5bb849cd-ecbf-e49d-01f4-010db68ef134}">
           <p14:sldIdLst>
             <p14:sldId id="282"/>
           </p14:sldIdLst>

--- a/neerlandais1/powerpoints/Module_27_Graag_of_houden_van.pptx
+++ b/neerlandais1/powerpoints/Module_27_Graag_of_houden_van.pptx
@@ -133,18 +133,18 @@
   <p:extLst>
     <p:ext uri="{521415D9-36F7-43E2-AB2F-B90AF26B5E84}">
       <p14:sectionLst xmlns:p14="http://schemas.microsoft.com/office/powerpoint/2010/main">
-        <p14:section name="Ouverture" id="{663380fb-6f27-69cf-e348-e6c293b9c539}">
+        <p14:section name="Ouverture" id="{f680c78f-c7e5-3802-6200-a3f9642255a3}">
           <p14:sldIdLst>
             <p14:sldId id="256"/>
           </p14:sldIdLst>
         </p14:section>
-        <p14:section name="Découvrir" id="{0cea2d41-dfa8-b0c1-c25f-3f487120a47a}">
+        <p14:section name="Découvrir" id="{0c0600fe-2615-c553-09f4-e752ceb1b343}">
           <p14:sldIdLst>
             <p14:sldId id="257"/>
             <p14:sldId id="258"/>
           </p14:sldIdLst>
         </p14:section>
-        <p14:section name="Comprendre" id="{53cb32d3-c879-9b2f-cd10-fcd620ed3b47}">
+        <p14:section name="Comprendre" id="{28b8f402-4338-e2ec-d9b9-f72bc31b8bf1}">
           <p14:sldIdLst>
             <p14:sldId id="259"/>
             <p14:sldId id="260"/>
@@ -158,7 +158,7 @@
             <p14:sldId id="268"/>
           </p14:sldIdLst>
         </p14:section>
-        <p14:section name="JIJ NU ! — Oefeningen" id="{1b34be93-0094-175a-ea25-9681bf203255}">
+        <p14:section name="JIJ NU ! — Oefeningen" id="{5af7903f-f4a3-4bbd-a658-787ac41e7e14}">
           <p14:sldIdLst>
             <p14:sldId id="269"/>
             <p14:sldId id="270"/>
@@ -175,7 +175,7 @@
             <p14:sldId id="281"/>
           </p14:sldIdLst>
         </p14:section>
-        <p14:section name="Clôture" id="{5bb849cd-ecbf-e49d-01f4-010db68ef134}">
+        <p14:section name="Clôture" id="{ff8c8b6e-29a3-cd22-ecf1-afa4db5942a1}">
           <p14:sldIdLst>
             <p14:sldId id="282"/>
           </p14:sldIdLst>
